--- a/00 PRESENTACIONES compartida alumnos/ED01b - Ingeniería de software.pptx
+++ b/00 PRESENTACIONES compartida alumnos/ED01b - Ingeniería de software.pptx
@@ -143,128 +143,6 @@
   <p188:author id="{BC3B1C98-D450-944A-5477-B47D9EACBE97}" name="MIGUEL TRIGUEROS MUÑOZ" initials="MM" userId="S::miguel.trigueros@aulaxxi.murciaeduca.es::a4ee0321-97d7-430f-98a8-7ed13ff9a4bf" providerId="AD"/>
   <p188:author id="{977F47D7-07F1-85A1-7633-049FB299B8FA}" name="MIGUEL TRIGUEROS MUÑOZ" initials="MT" userId="S::MIGUEL.TRIGUEROS@aulaxxi.murciaeduca.es::a4ee0321-97d7-430f-98a8-7ed13ff9a4bf" providerId="AD"/>
 </p188:authorLst>
-</file>
-
-<file path=ppt/revisionInfo.xml><?xml version="1.0" encoding="utf-8"?>
-<p1510:revInfo xmlns:a="http://schemas.openxmlformats.org/drawingml/2006/main" xmlns:r="http://schemas.openxmlformats.org/officeDocument/2006/relationships" xmlns:p1510="http://schemas.microsoft.com/office/powerpoint/2015/10/main">
-  <p1510:revLst>
-    <p1510:client id="{39BEA3D4-3504-DC2E-698D-97F23CA8B2F0}" v="188" dt="2025-10-04T05:37:25.056"/>
-  </p1510:revLst>
-</p1510:revInfo>
-</file>
-
-<file path=ppt/changesInfos/changesInfo1.xml><?xml version="1.0" encoding="utf-8"?>
-<pc:chgInfo xmlns:a="http://schemas.openxmlformats.org/drawingml/2006/main" xmlns:r="http://schemas.openxmlformats.org/officeDocument/2006/relationships" xmlns:ac="http://schemas.microsoft.com/office/drawing/2013/main/command" xmlns:pc="http://schemas.microsoft.com/office/powerpoint/2013/main/command">
-  <pc:docChgLst>
-    <pc:chgData name="MIGUEL TRIGUEROS MUÑOZ" userId="a4ee0321-97d7-430f-98a8-7ed13ff9a4bf" providerId="ADAL" clId="{6EE8E80F-F211-4A9B-9011-A3407143D2A0}"/>
-    <pc:docChg chg="modSld">
-      <pc:chgData name="MIGUEL TRIGUEROS MUÑOZ" userId="a4ee0321-97d7-430f-98a8-7ed13ff9a4bf" providerId="ADAL" clId="{6EE8E80F-F211-4A9B-9011-A3407143D2A0}" dt="2025-10-03T14:49:58.843" v="3" actId="20577"/>
-      <pc:docMkLst>
-        <pc:docMk/>
-      </pc:docMkLst>
-      <pc:sldChg chg="modSp mod">
-        <pc:chgData name="MIGUEL TRIGUEROS MUÑOZ" userId="a4ee0321-97d7-430f-98a8-7ed13ff9a4bf" providerId="ADAL" clId="{6EE8E80F-F211-4A9B-9011-A3407143D2A0}" dt="2025-10-03T14:49:58.843" v="3" actId="20577"/>
-        <pc:sldMkLst>
-          <pc:docMk/>
-          <pc:sldMk cId="308865771" sldId="256"/>
-        </pc:sldMkLst>
-        <pc:spChg chg="mod">
-          <ac:chgData name="MIGUEL TRIGUEROS MUÑOZ" userId="a4ee0321-97d7-430f-98a8-7ed13ff9a4bf" providerId="ADAL" clId="{6EE8E80F-F211-4A9B-9011-A3407143D2A0}" dt="2025-10-03T14:49:58.843" v="3" actId="20577"/>
-          <ac:spMkLst>
-            <pc:docMk/>
-            <pc:sldMk cId="308865771" sldId="256"/>
-            <ac:spMk id="2" creationId="{BB6B5ACD-B995-716B-F5F7-1C14289F141D}"/>
-          </ac:spMkLst>
-        </pc:spChg>
-      </pc:sldChg>
-    </pc:docChg>
-  </pc:docChgLst>
-  <pc:docChgLst>
-    <pc:chgData name="MIGUEL TRIGUEROS MUÑOZ" userId="S::miguel.trigueros@aulaxxi.murciaeduca.es::a4ee0321-97d7-430f-98a8-7ed13ff9a4bf" providerId="AD" clId="Web-{39BEA3D4-3504-DC2E-698D-97F23CA8B2F0}"/>
-    <pc:docChg chg="modSld">
-      <pc:chgData name="MIGUEL TRIGUEROS MUÑOZ" userId="S::miguel.trigueros@aulaxxi.murciaeduca.es::a4ee0321-97d7-430f-98a8-7ed13ff9a4bf" providerId="AD" clId="Web-{39BEA3D4-3504-DC2E-698D-97F23CA8B2F0}" dt="2025-10-04T05:37:25.056" v="135" actId="20577"/>
-      <pc:docMkLst>
-        <pc:docMk/>
-      </pc:docMkLst>
-      <pc:sldChg chg="modSp">
-        <pc:chgData name="MIGUEL TRIGUEROS MUÑOZ" userId="S::miguel.trigueros@aulaxxi.murciaeduca.es::a4ee0321-97d7-430f-98a8-7ed13ff9a4bf" providerId="AD" clId="Web-{39BEA3D4-3504-DC2E-698D-97F23CA8B2F0}" dt="2025-10-04T05:37:25.056" v="135" actId="20577"/>
-        <pc:sldMkLst>
-          <pc:docMk/>
-          <pc:sldMk cId="234060036" sldId="278"/>
-        </pc:sldMkLst>
-        <pc:spChg chg="mod">
-          <ac:chgData name="MIGUEL TRIGUEROS MUÑOZ" userId="S::miguel.trigueros@aulaxxi.murciaeduca.es::a4ee0321-97d7-430f-98a8-7ed13ff9a4bf" providerId="AD" clId="Web-{39BEA3D4-3504-DC2E-698D-97F23CA8B2F0}" dt="2025-10-04T05:37:25.056" v="135" actId="20577"/>
-          <ac:spMkLst>
-            <pc:docMk/>
-            <pc:sldMk cId="234060036" sldId="278"/>
-            <ac:spMk id="5" creationId="{AB90D566-8559-AAD8-1CEB-27FE7C93EAC3}"/>
-          </ac:spMkLst>
-        </pc:spChg>
-        <pc:graphicFrameChg chg="mod">
-          <ac:chgData name="MIGUEL TRIGUEROS MUÑOZ" userId="S::miguel.trigueros@aulaxxi.murciaeduca.es::a4ee0321-97d7-430f-98a8-7ed13ff9a4bf" providerId="AD" clId="Web-{39BEA3D4-3504-DC2E-698D-97F23CA8B2F0}" dt="2025-10-04T05:36:40.503" v="101" actId="14100"/>
-          <ac:graphicFrameMkLst>
-            <pc:docMk/>
-            <pc:sldMk cId="234060036" sldId="278"/>
-            <ac:graphicFrameMk id="9" creationId="{FA7DB58F-83A0-C760-49F1-BA55F1B02D3F}"/>
-          </ac:graphicFrameMkLst>
-        </pc:graphicFrameChg>
-      </pc:sldChg>
-      <pc:sldChg chg="modSp">
-        <pc:chgData name="MIGUEL TRIGUEROS MUÑOZ" userId="S::miguel.trigueros@aulaxxi.murciaeduca.es::a4ee0321-97d7-430f-98a8-7ed13ff9a4bf" providerId="AD" clId="Web-{39BEA3D4-3504-DC2E-698D-97F23CA8B2F0}" dt="2025-10-04T05:31:23.855" v="12" actId="20577"/>
-        <pc:sldMkLst>
-          <pc:docMk/>
-          <pc:sldMk cId="2216667076" sldId="281"/>
-        </pc:sldMkLst>
-        <pc:spChg chg="mod">
-          <ac:chgData name="MIGUEL TRIGUEROS MUÑOZ" userId="S::miguel.trigueros@aulaxxi.murciaeduca.es::a4ee0321-97d7-430f-98a8-7ed13ff9a4bf" providerId="AD" clId="Web-{39BEA3D4-3504-DC2E-698D-97F23CA8B2F0}" dt="2025-10-04T05:31:23.855" v="12" actId="20577"/>
-          <ac:spMkLst>
-            <pc:docMk/>
-            <pc:sldMk cId="2216667076" sldId="281"/>
-            <ac:spMk id="12" creationId="{3538DB87-89AE-C169-4C80-C15D9B232DEB}"/>
-          </ac:spMkLst>
-        </pc:spChg>
-      </pc:sldChg>
-      <pc:sldChg chg="modSp">
-        <pc:chgData name="MIGUEL TRIGUEROS MUÑOZ" userId="S::miguel.trigueros@aulaxxi.murciaeduca.es::a4ee0321-97d7-430f-98a8-7ed13ff9a4bf" providerId="AD" clId="Web-{39BEA3D4-3504-DC2E-698D-97F23CA8B2F0}" dt="2025-10-04T05:34:35.782" v="17" actId="20577"/>
-        <pc:sldMkLst>
-          <pc:docMk/>
-          <pc:sldMk cId="1697092290" sldId="318"/>
-        </pc:sldMkLst>
-        <pc:spChg chg="mod">
-          <ac:chgData name="MIGUEL TRIGUEROS MUÑOZ" userId="S::miguel.trigueros@aulaxxi.murciaeduca.es::a4ee0321-97d7-430f-98a8-7ed13ff9a4bf" providerId="AD" clId="Web-{39BEA3D4-3504-DC2E-698D-97F23CA8B2F0}" dt="2025-10-04T05:34:35.782" v="17" actId="20577"/>
-          <ac:spMkLst>
-            <pc:docMk/>
-            <pc:sldMk cId="1697092290" sldId="318"/>
-            <ac:spMk id="5" creationId="{B53BE892-83A6-687A-7513-160990AA5D50}"/>
-          </ac:spMkLst>
-        </pc:spChg>
-      </pc:sldChg>
-      <pc:sldChg chg="addSp modSp">
-        <pc:chgData name="MIGUEL TRIGUEROS MUÑOZ" userId="S::miguel.trigueros@aulaxxi.murciaeduca.es::a4ee0321-97d7-430f-98a8-7ed13ff9a4bf" providerId="AD" clId="Web-{39BEA3D4-3504-DC2E-698D-97F23CA8B2F0}" dt="2025-10-04T05:36:44.550" v="103" actId="1076"/>
-        <pc:sldMkLst>
-          <pc:docMk/>
-          <pc:sldMk cId="2271490309" sldId="321"/>
-        </pc:sldMkLst>
-        <pc:spChg chg="add mod">
-          <ac:chgData name="MIGUEL TRIGUEROS MUÑOZ" userId="S::miguel.trigueros@aulaxxi.murciaeduca.es::a4ee0321-97d7-430f-98a8-7ed13ff9a4bf" providerId="AD" clId="Web-{39BEA3D4-3504-DC2E-698D-97F23CA8B2F0}" dt="2025-10-04T05:36:44.550" v="103" actId="1076"/>
-          <ac:spMkLst>
-            <pc:docMk/>
-            <pc:sldMk cId="2271490309" sldId="321"/>
-            <ac:spMk id="5" creationId="{7789468B-FE05-33A4-87B6-B5B032ED0E15}"/>
-          </ac:spMkLst>
-        </pc:spChg>
-        <pc:spChg chg="mod">
-          <ac:chgData name="MIGUEL TRIGUEROS MUÑOZ" userId="S::miguel.trigueros@aulaxxi.murciaeduca.es::a4ee0321-97d7-430f-98a8-7ed13ff9a4bf" providerId="AD" clId="Web-{39BEA3D4-3504-DC2E-698D-97F23CA8B2F0}" dt="2025-10-04T05:35:07.079" v="37" actId="20577"/>
-          <ac:spMkLst>
-            <pc:docMk/>
-            <pc:sldMk cId="2271490309" sldId="321"/>
-            <ac:spMk id="8" creationId="{1CF962FB-D527-45A6-661F-2337532E4A09}"/>
-          </ac:spMkLst>
-        </pc:spChg>
-      </pc:sldChg>
-    </pc:docChg>
-  </pc:docChgLst>
-</pc:chgInfo>
 </file>
 
 <file path=ppt/diagrams/colors1.xml><?xml version="1.0" encoding="utf-8"?>
@@ -12402,7 +12280,7 @@
           <a:p>
             <a:fld id="{01C5D9D8-45B2-436E-B320-4A67AE687407}" type="datetimeFigureOut">
               <a:rPr lang="es-ES" smtClean="0"/>
-              <a:t>03/10/2025</a:t>
+              <a:t>14/11/2025</a:t>
             </a:fld>
             <a:endParaRPr lang="es-ES"/>
           </a:p>
@@ -14885,7 +14763,7 @@
           <a:p>
             <a:fld id="{F9F96292-D7F7-4C8E-8264-8F64A2D1CA48}" type="datetime1">
               <a:rPr lang="es-ES" smtClean="0"/>
-              <a:t>03/10/2025</a:t>
+              <a:t>14/11/2025</a:t>
             </a:fld>
             <a:endParaRPr lang="es-ES"/>
           </a:p>
@@ -15280,7 +15158,7 @@
           <a:p>
             <a:fld id="{5EBA515E-10BB-41B5-8756-6894E0D8B571}" type="datetime1">
               <a:rPr lang="es-ES" smtClean="0"/>
-              <a:t>03/10/2025</a:t>
+              <a:t>14/11/2025</a:t>
             </a:fld>
             <a:endParaRPr lang="es-ES"/>
           </a:p>
